--- a/Planning docs/Slides/lesson-1-1-teacher-slides.pptx
+++ b/Planning docs/Slides/lesson-1-1-teacher-slides.pptx
@@ -4846,24 +4846,7 @@
                 <a:ea typeface="Calibri" pitchFamily="34" charset="-122"/>
                 <a:cs typeface="Calibri" pitchFamily="34" charset="-120"/>
               </a:rPr>
-              <a:t>•  After reading about the bulletin board falling on Stanley, pause here. How do you think Stanley feels when he wakes up and realizes he is flat? Would you be scared, excited, or something else?</a:t>
-            </a:r>
-            <a:endParaRPr lang="en-US" sz="1500" dirty="0"/>
-          </a:p>
-          <a:p>
-            <a:pPr indent="0" marL="0">
-              <a:buNone/>
-            </a:pPr>
-            <a:r>
-              <a:rPr lang="en-US" sz="1500" dirty="0">
-                <a:solidFill>
-                  <a:srgbClr val="1E293B"/>
-                </a:solidFill>
-                <a:latin typeface="Calibri" pitchFamily="34" charset="0"/>
-                <a:ea typeface="Calibri" pitchFamily="34" charset="-122"/>
-                <a:cs typeface="Calibri" pitchFamily="34" charset="-120"/>
-              </a:rPr>
-              <a:t>•  Arthur shouts for his parents. What do you think he saw?</a:t>
+              <a:t>•  Stop when the family lifts the board off the bed and Mr. Lambchop says “As a pancake.” Before you started, you previewed the book and wrote a question. Has this page answered it? Write one new question you now want the book to answer.</a:t>
             </a:r>
             <a:endParaRPr lang="en-US" sz="1500" dirty="0"/>
           </a:p>
